--- a/docs/pptx/auc3/ritu-auc3-linsubhr-ratio-hosp8.pptx
+++ b/docs/pptx/auc3/ritu-auc3-linsubhr-ratio-hosp8.pptx
@@ -2443,7 +2443,7 @@
           </p:nvSpPr>
           <p:spPr>
             <a:xfrm>
-              <a:off x="1463479" y="2073503"/>
+              <a:off x="1464298" y="2073503"/>
               <a:ext cx="0" cy="3649639"/>
             </a:xfrm>
             <a:custGeom>
@@ -2486,7 +2486,7 @@
           </p:nvSpPr>
           <p:spPr>
             <a:xfrm>
-              <a:off x="3267849" y="2073503"/>
+              <a:off x="3268188" y="2073503"/>
               <a:ext cx="0" cy="3649639"/>
             </a:xfrm>
             <a:custGeom>
@@ -2529,7 +2529,7 @@
           </p:nvSpPr>
           <p:spPr>
             <a:xfrm>
-              <a:off x="5072218" y="2073503"/>
+              <a:off x="5072078" y="2073503"/>
               <a:ext cx="0" cy="3649639"/>
             </a:xfrm>
             <a:custGeom>
@@ -2572,7 +2572,7 @@
           </p:nvSpPr>
           <p:spPr>
             <a:xfrm>
-              <a:off x="6876587" y="2073503"/>
+              <a:off x="6875967" y="2073503"/>
               <a:ext cx="0" cy="3649639"/>
             </a:xfrm>
             <a:custGeom>
@@ -2830,7 +2830,7 @@
           </p:nvSpPr>
           <p:spPr>
             <a:xfrm>
-              <a:off x="2365664" y="2073503"/>
+              <a:off x="2366243" y="2073503"/>
               <a:ext cx="0" cy="3649639"/>
             </a:xfrm>
             <a:custGeom>
@@ -2873,7 +2873,7 @@
           </p:nvSpPr>
           <p:spPr>
             <a:xfrm>
-              <a:off x="4170033" y="2073503"/>
+              <a:off x="4170133" y="2073503"/>
               <a:ext cx="0" cy="3649639"/>
             </a:xfrm>
             <a:custGeom>
@@ -2916,7 +2916,7 @@
           </p:nvSpPr>
           <p:spPr>
             <a:xfrm>
-              <a:off x="5974402" y="2073503"/>
+              <a:off x="5974022" y="2073503"/>
               <a:ext cx="0" cy="3649639"/>
             </a:xfrm>
             <a:custGeom>
@@ -2959,7 +2959,7 @@
           </p:nvSpPr>
           <p:spPr>
             <a:xfrm>
-              <a:off x="7778772" y="2073503"/>
+              <a:off x="7777912" y="2073503"/>
               <a:ext cx="0" cy="3649639"/>
             </a:xfrm>
             <a:custGeom>
@@ -3002,369 +3002,366 @@
           </p:nvSpPr>
           <p:spPr>
             <a:xfrm>
-              <a:off x="4002328" y="2073503"/>
-              <a:ext cx="4260351" cy="3483746"/>
+              <a:off x="4046001" y="2073503"/>
+              <a:ext cx="4216677" cy="3483746"/>
             </a:xfrm>
             <a:custGeom>
               <a:avLst/>
               <a:pathLst>
-                <a:path w="4260351" h="3483746">
+                <a:path w="4216677" h="3483746">
                   <a:moveTo>
-                    <a:pt x="47090" y="0"/>
+                    <a:pt x="31037" y="0"/>
                   </a:moveTo>
                   <a:lnTo>
-                    <a:pt x="106244" y="1849016"/>
-                  </a:lnTo>
-                  <a:lnTo>
-                    <a:pt x="177867" y="2755871"/>
-                  </a:lnTo>
-                  <a:lnTo>
-                    <a:pt x="249489" y="3088974"/>
-                  </a:lnTo>
-                  <a:lnTo>
-                    <a:pt x="321112" y="3269637"/>
-                  </a:lnTo>
-                  <a:lnTo>
-                    <a:pt x="392734" y="3367622"/>
-                  </a:lnTo>
-                  <a:lnTo>
-                    <a:pt x="464357" y="3420765"/>
-                  </a:lnTo>
-                  <a:lnTo>
-                    <a:pt x="535980" y="3449588"/>
-                  </a:lnTo>
-                  <a:lnTo>
-                    <a:pt x="607602" y="3465220"/>
-                  </a:lnTo>
-                  <a:lnTo>
-                    <a:pt x="679225" y="3473698"/>
-                  </a:lnTo>
-                  <a:lnTo>
-                    <a:pt x="750847" y="3478297"/>
-                  </a:lnTo>
-                  <a:lnTo>
-                    <a:pt x="822470" y="3480791"/>
-                  </a:lnTo>
-                  <a:lnTo>
-                    <a:pt x="894092" y="3482143"/>
-                  </a:lnTo>
-                  <a:lnTo>
-                    <a:pt x="965715" y="3482877"/>
-                  </a:lnTo>
-                  <a:lnTo>
-                    <a:pt x="1037337" y="3483275"/>
-                  </a:lnTo>
-                  <a:lnTo>
-                    <a:pt x="1108960" y="3483491"/>
-                  </a:lnTo>
-                  <a:lnTo>
-                    <a:pt x="1180582" y="3483608"/>
-                  </a:lnTo>
-                  <a:lnTo>
-                    <a:pt x="1252205" y="3483671"/>
-                  </a:lnTo>
-                  <a:lnTo>
-                    <a:pt x="1323827" y="3483706"/>
-                  </a:lnTo>
-                  <a:lnTo>
-                    <a:pt x="1395450" y="3483724"/>
-                  </a:lnTo>
-                  <a:lnTo>
-                    <a:pt x="1467072" y="3483734"/>
-                  </a:lnTo>
-                  <a:lnTo>
-                    <a:pt x="1538695" y="3483740"/>
-                  </a:lnTo>
-                  <a:lnTo>
-                    <a:pt x="1610317" y="3483743"/>
-                  </a:lnTo>
-                  <a:lnTo>
-                    <a:pt x="1681940" y="3483744"/>
-                  </a:lnTo>
-                  <a:lnTo>
-                    <a:pt x="1753562" y="3483745"/>
-                  </a:lnTo>
-                  <a:lnTo>
-                    <a:pt x="1825185" y="3483746"/>
-                  </a:lnTo>
-                  <a:lnTo>
-                    <a:pt x="1896808" y="3483746"/>
-                  </a:lnTo>
-                  <a:lnTo>
-                    <a:pt x="1968430" y="3483746"/>
-                  </a:lnTo>
-                  <a:lnTo>
-                    <a:pt x="2040053" y="3483746"/>
-                  </a:lnTo>
-                  <a:lnTo>
-                    <a:pt x="2111675" y="3483746"/>
-                  </a:lnTo>
-                  <a:lnTo>
-                    <a:pt x="2183298" y="3483746"/>
-                  </a:lnTo>
-                  <a:lnTo>
-                    <a:pt x="2254920" y="3483746"/>
-                  </a:lnTo>
-                  <a:lnTo>
-                    <a:pt x="2326543" y="3483746"/>
-                  </a:lnTo>
-                  <a:lnTo>
-                    <a:pt x="2398165" y="3483746"/>
-                  </a:lnTo>
-                  <a:lnTo>
-                    <a:pt x="2469788" y="3483746"/>
-                  </a:lnTo>
-                  <a:lnTo>
-                    <a:pt x="2541410" y="3483746"/>
-                  </a:lnTo>
-                  <a:lnTo>
-                    <a:pt x="2613033" y="3483746"/>
-                  </a:lnTo>
-                  <a:lnTo>
-                    <a:pt x="2684655" y="3483746"/>
-                  </a:lnTo>
-                  <a:lnTo>
-                    <a:pt x="2756278" y="3483746"/>
-                  </a:lnTo>
-                  <a:lnTo>
-                    <a:pt x="2827900" y="3483746"/>
-                  </a:lnTo>
-                  <a:lnTo>
-                    <a:pt x="2899523" y="3483746"/>
-                  </a:lnTo>
-                  <a:lnTo>
-                    <a:pt x="2971145" y="3483746"/>
-                  </a:lnTo>
-                  <a:lnTo>
-                    <a:pt x="3042768" y="3483746"/>
-                  </a:lnTo>
-                  <a:lnTo>
-                    <a:pt x="3114390" y="3483746"/>
-                  </a:lnTo>
-                  <a:lnTo>
-                    <a:pt x="3186013" y="3483746"/>
-                  </a:lnTo>
-                  <a:lnTo>
-                    <a:pt x="3257636" y="3483746"/>
-                  </a:lnTo>
-                  <a:lnTo>
-                    <a:pt x="3329258" y="3483746"/>
-                  </a:lnTo>
-                  <a:lnTo>
-                    <a:pt x="3400881" y="3483746"/>
-                  </a:lnTo>
-                  <a:lnTo>
-                    <a:pt x="3472503" y="3483746"/>
-                  </a:lnTo>
-                  <a:lnTo>
-                    <a:pt x="3544126" y="3483746"/>
-                  </a:lnTo>
-                  <a:lnTo>
-                    <a:pt x="3615748" y="3483746"/>
-                  </a:lnTo>
-                  <a:lnTo>
-                    <a:pt x="3687371" y="3483746"/>
-                  </a:lnTo>
-                  <a:lnTo>
-                    <a:pt x="3758993" y="3483746"/>
-                  </a:lnTo>
-                  <a:lnTo>
-                    <a:pt x="3830616" y="3483746"/>
-                  </a:lnTo>
-                  <a:lnTo>
-                    <a:pt x="3902238" y="3483746"/>
-                  </a:lnTo>
-                  <a:lnTo>
-                    <a:pt x="3973861" y="3483746"/>
-                  </a:lnTo>
-                  <a:lnTo>
-                    <a:pt x="4045483" y="3483746"/>
-                  </a:lnTo>
-                  <a:lnTo>
-                    <a:pt x="4117106" y="3483746"/>
-                  </a:lnTo>
-                  <a:lnTo>
-                    <a:pt x="4188728" y="3483746"/>
-                  </a:lnTo>
-                  <a:lnTo>
-                    <a:pt x="4260351" y="3483746"/>
-                  </a:lnTo>
-                  <a:lnTo>
-                    <a:pt x="4188728" y="3483746"/>
-                  </a:lnTo>
-                  <a:lnTo>
-                    <a:pt x="4117106" y="3483746"/>
-                  </a:lnTo>
-                  <a:lnTo>
-                    <a:pt x="4045483" y="3483746"/>
-                  </a:lnTo>
-                  <a:lnTo>
-                    <a:pt x="3973861" y="3483746"/>
-                  </a:lnTo>
-                  <a:lnTo>
-                    <a:pt x="3902238" y="3483746"/>
-                  </a:lnTo>
-                  <a:lnTo>
-                    <a:pt x="3830616" y="3483746"/>
-                  </a:lnTo>
-                  <a:lnTo>
-                    <a:pt x="3758993" y="3483746"/>
-                  </a:lnTo>
-                  <a:lnTo>
-                    <a:pt x="3687371" y="3483746"/>
-                  </a:lnTo>
-                  <a:lnTo>
-                    <a:pt x="3615748" y="3483746"/>
-                  </a:lnTo>
-                  <a:lnTo>
-                    <a:pt x="3544126" y="3483746"/>
-                  </a:lnTo>
-                  <a:lnTo>
-                    <a:pt x="3472503" y="3483746"/>
-                  </a:lnTo>
-                  <a:lnTo>
-                    <a:pt x="3400881" y="3483746"/>
-                  </a:lnTo>
-                  <a:lnTo>
-                    <a:pt x="3329258" y="3483746"/>
-                  </a:lnTo>
-                  <a:lnTo>
-                    <a:pt x="3257636" y="3483746"/>
-                  </a:lnTo>
-                  <a:lnTo>
-                    <a:pt x="3186013" y="3483746"/>
-                  </a:lnTo>
-                  <a:lnTo>
-                    <a:pt x="3114390" y="3483746"/>
-                  </a:lnTo>
-                  <a:lnTo>
-                    <a:pt x="3042768" y="3483746"/>
-                  </a:lnTo>
-                  <a:lnTo>
-                    <a:pt x="2971145" y="3483746"/>
-                  </a:lnTo>
-                  <a:lnTo>
-                    <a:pt x="2899523" y="3483746"/>
-                  </a:lnTo>
-                  <a:lnTo>
-                    <a:pt x="2827900" y="3483746"/>
-                  </a:lnTo>
-                  <a:lnTo>
-                    <a:pt x="2756278" y="3483746"/>
-                  </a:lnTo>
-                  <a:lnTo>
-                    <a:pt x="2684655" y="3483746"/>
-                  </a:lnTo>
-                  <a:lnTo>
-                    <a:pt x="2613033" y="3483746"/>
-                  </a:lnTo>
-                  <a:lnTo>
-                    <a:pt x="2541410" y="3483746"/>
-                  </a:lnTo>
-                  <a:lnTo>
-                    <a:pt x="2469788" y="3483746"/>
-                  </a:lnTo>
-                  <a:lnTo>
-                    <a:pt x="2398165" y="3483746"/>
-                  </a:lnTo>
-                  <a:lnTo>
-                    <a:pt x="2326543" y="3483746"/>
-                  </a:lnTo>
-                  <a:lnTo>
-                    <a:pt x="2254920" y="3483746"/>
-                  </a:lnTo>
-                  <a:lnTo>
-                    <a:pt x="2183298" y="3483746"/>
-                  </a:lnTo>
-                  <a:lnTo>
-                    <a:pt x="2111675" y="3483746"/>
-                  </a:lnTo>
-                  <a:lnTo>
-                    <a:pt x="2040053" y="3483746"/>
-                  </a:lnTo>
-                  <a:lnTo>
-                    <a:pt x="1968430" y="3483746"/>
-                  </a:lnTo>
-                  <a:lnTo>
-                    <a:pt x="1896808" y="3483746"/>
-                  </a:lnTo>
-                  <a:lnTo>
-                    <a:pt x="1825185" y="3483746"/>
-                  </a:lnTo>
-                  <a:lnTo>
-                    <a:pt x="1753562" y="3483746"/>
-                  </a:lnTo>
-                  <a:lnTo>
-                    <a:pt x="1681940" y="3483746"/>
-                  </a:lnTo>
-                  <a:lnTo>
-                    <a:pt x="1610317" y="3483746"/>
-                  </a:lnTo>
-                  <a:lnTo>
-                    <a:pt x="1538695" y="3483746"/>
-                  </a:lnTo>
-                  <a:lnTo>
-                    <a:pt x="1467072" y="3483746"/>
-                  </a:lnTo>
-                  <a:lnTo>
-                    <a:pt x="1395450" y="3483746"/>
-                  </a:lnTo>
-                  <a:lnTo>
-                    <a:pt x="1323827" y="3483746"/>
-                  </a:lnTo>
-                  <a:lnTo>
-                    <a:pt x="1252205" y="3483745"/>
-                  </a:lnTo>
-                  <a:lnTo>
-                    <a:pt x="1180582" y="3483742"/>
-                  </a:lnTo>
-                  <a:lnTo>
-                    <a:pt x="1108960" y="3483737"/>
-                  </a:lnTo>
-                  <a:lnTo>
-                    <a:pt x="1037337" y="3483724"/>
-                  </a:lnTo>
-                  <a:lnTo>
-                    <a:pt x="965715" y="3483694"/>
-                  </a:lnTo>
-                  <a:lnTo>
-                    <a:pt x="894092" y="3483623"/>
-                  </a:lnTo>
-                  <a:lnTo>
-                    <a:pt x="822470" y="3483453"/>
-                  </a:lnTo>
-                  <a:lnTo>
-                    <a:pt x="750847" y="3483052"/>
-                  </a:lnTo>
-                  <a:lnTo>
-                    <a:pt x="679225" y="3482101"/>
-                  </a:lnTo>
-                  <a:lnTo>
-                    <a:pt x="607602" y="3479848"/>
-                  </a:lnTo>
-                  <a:lnTo>
-                    <a:pt x="535980" y="3474509"/>
-                  </a:lnTo>
-                  <a:lnTo>
-                    <a:pt x="464357" y="3461860"/>
-                  </a:lnTo>
-                  <a:lnTo>
-                    <a:pt x="392734" y="3431886"/>
-                  </a:lnTo>
-                  <a:lnTo>
-                    <a:pt x="321112" y="3360864"/>
-                  </a:lnTo>
-                  <a:lnTo>
-                    <a:pt x="249489" y="3192580"/>
-                  </a:lnTo>
-                  <a:lnTo>
-                    <a:pt x="177867" y="2793834"/>
-                  </a:lnTo>
-                  <a:lnTo>
-                    <a:pt x="106244" y="2141698"/>
-                  </a:lnTo>
-                  <a:lnTo>
-                    <a:pt x="34622" y="1009296"/>
+                    <a:pt x="62571" y="1510661"/>
+                  </a:lnTo>
+                  <a:lnTo>
+                    <a:pt x="134193" y="2743249"/>
+                  </a:lnTo>
+                  <a:lnTo>
+                    <a:pt x="205816" y="3154548"/>
+                  </a:lnTo>
+                  <a:lnTo>
+                    <a:pt x="277438" y="3337396"/>
+                  </a:lnTo>
+                  <a:lnTo>
+                    <a:pt x="349061" y="3418684"/>
+                  </a:lnTo>
+                  <a:lnTo>
+                    <a:pt x="420683" y="3454822"/>
+                  </a:lnTo>
+                  <a:lnTo>
+                    <a:pt x="492306" y="3470888"/>
+                  </a:lnTo>
+                  <a:lnTo>
+                    <a:pt x="563928" y="3478030"/>
+                  </a:lnTo>
+                  <a:lnTo>
+                    <a:pt x="635551" y="3481205"/>
+                  </a:lnTo>
+                  <a:lnTo>
+                    <a:pt x="707174" y="3482617"/>
+                  </a:lnTo>
+                  <a:lnTo>
+                    <a:pt x="778796" y="3483244"/>
+                  </a:lnTo>
+                  <a:lnTo>
+                    <a:pt x="850419" y="3483523"/>
+                  </a:lnTo>
+                  <a:lnTo>
+                    <a:pt x="922041" y="3483647"/>
+                  </a:lnTo>
+                  <a:lnTo>
+                    <a:pt x="993664" y="3483702"/>
+                  </a:lnTo>
+                  <a:lnTo>
+                    <a:pt x="1065286" y="3483727"/>
+                  </a:lnTo>
+                  <a:lnTo>
+                    <a:pt x="1136909" y="3483738"/>
+                  </a:lnTo>
+                  <a:lnTo>
+                    <a:pt x="1208531" y="3483743"/>
+                  </a:lnTo>
+                  <a:lnTo>
+                    <a:pt x="1280154" y="3483745"/>
+                  </a:lnTo>
+                  <a:lnTo>
+                    <a:pt x="1351776" y="3483746"/>
+                  </a:lnTo>
+                  <a:lnTo>
+                    <a:pt x="1423399" y="3483746"/>
+                  </a:lnTo>
+                  <a:lnTo>
+                    <a:pt x="1495021" y="3483746"/>
+                  </a:lnTo>
+                  <a:lnTo>
+                    <a:pt x="1566644" y="3483746"/>
+                  </a:lnTo>
+                  <a:lnTo>
+                    <a:pt x="1638266" y="3483746"/>
+                  </a:lnTo>
+                  <a:lnTo>
+                    <a:pt x="1709889" y="3483746"/>
+                  </a:lnTo>
+                  <a:lnTo>
+                    <a:pt x="1781511" y="3483746"/>
+                  </a:lnTo>
+                  <a:lnTo>
+                    <a:pt x="1853134" y="3483746"/>
+                  </a:lnTo>
+                  <a:lnTo>
+                    <a:pt x="1924756" y="3483746"/>
+                  </a:lnTo>
+                  <a:lnTo>
+                    <a:pt x="1996379" y="3483746"/>
+                  </a:lnTo>
+                  <a:lnTo>
+                    <a:pt x="2068002" y="3483746"/>
+                  </a:lnTo>
+                  <a:lnTo>
+                    <a:pt x="2139624" y="3483746"/>
+                  </a:lnTo>
+                  <a:lnTo>
+                    <a:pt x="2211247" y="3483746"/>
+                  </a:lnTo>
+                  <a:lnTo>
+                    <a:pt x="2282869" y="3483746"/>
+                  </a:lnTo>
+                  <a:lnTo>
+                    <a:pt x="2354492" y="3483746"/>
+                  </a:lnTo>
+                  <a:lnTo>
+                    <a:pt x="2426114" y="3483746"/>
+                  </a:lnTo>
+                  <a:lnTo>
+                    <a:pt x="2497737" y="3483746"/>
+                  </a:lnTo>
+                  <a:lnTo>
+                    <a:pt x="2569359" y="3483746"/>
+                  </a:lnTo>
+                  <a:lnTo>
+                    <a:pt x="2640982" y="3483746"/>
+                  </a:lnTo>
+                  <a:lnTo>
+                    <a:pt x="2712604" y="3483746"/>
+                  </a:lnTo>
+                  <a:lnTo>
+                    <a:pt x="2784227" y="3483746"/>
+                  </a:lnTo>
+                  <a:lnTo>
+                    <a:pt x="2855849" y="3483746"/>
+                  </a:lnTo>
+                  <a:lnTo>
+                    <a:pt x="2927472" y="3483746"/>
+                  </a:lnTo>
+                  <a:lnTo>
+                    <a:pt x="2999094" y="3483746"/>
+                  </a:lnTo>
+                  <a:lnTo>
+                    <a:pt x="3070717" y="3483746"/>
+                  </a:lnTo>
+                  <a:lnTo>
+                    <a:pt x="3142339" y="3483746"/>
+                  </a:lnTo>
+                  <a:lnTo>
+                    <a:pt x="3213962" y="3483746"/>
+                  </a:lnTo>
+                  <a:lnTo>
+                    <a:pt x="3285584" y="3483746"/>
+                  </a:lnTo>
+                  <a:lnTo>
+                    <a:pt x="3357207" y="3483746"/>
+                  </a:lnTo>
+                  <a:lnTo>
+                    <a:pt x="3428830" y="3483746"/>
+                  </a:lnTo>
+                  <a:lnTo>
+                    <a:pt x="3500452" y="3483746"/>
+                  </a:lnTo>
+                  <a:lnTo>
+                    <a:pt x="3572075" y="3483746"/>
+                  </a:lnTo>
+                  <a:lnTo>
+                    <a:pt x="3643697" y="3483746"/>
+                  </a:lnTo>
+                  <a:lnTo>
+                    <a:pt x="3715320" y="3483746"/>
+                  </a:lnTo>
+                  <a:lnTo>
+                    <a:pt x="3786942" y="3483746"/>
+                  </a:lnTo>
+                  <a:lnTo>
+                    <a:pt x="3858565" y="3483746"/>
+                  </a:lnTo>
+                  <a:lnTo>
+                    <a:pt x="3930187" y="3483746"/>
+                  </a:lnTo>
+                  <a:lnTo>
+                    <a:pt x="4001810" y="3483746"/>
+                  </a:lnTo>
+                  <a:lnTo>
+                    <a:pt x="4073432" y="3483746"/>
+                  </a:lnTo>
+                  <a:lnTo>
+                    <a:pt x="4145055" y="3483746"/>
+                  </a:lnTo>
+                  <a:lnTo>
+                    <a:pt x="4216677" y="3483746"/>
+                  </a:lnTo>
+                  <a:lnTo>
+                    <a:pt x="4145055" y="3483746"/>
+                  </a:lnTo>
+                  <a:lnTo>
+                    <a:pt x="4073432" y="3483746"/>
+                  </a:lnTo>
+                  <a:lnTo>
+                    <a:pt x="4001810" y="3483746"/>
+                  </a:lnTo>
+                  <a:lnTo>
+                    <a:pt x="3930187" y="3483746"/>
+                  </a:lnTo>
+                  <a:lnTo>
+                    <a:pt x="3858565" y="3483746"/>
+                  </a:lnTo>
+                  <a:lnTo>
+                    <a:pt x="3786942" y="3483746"/>
+                  </a:lnTo>
+                  <a:lnTo>
+                    <a:pt x="3715320" y="3483746"/>
+                  </a:lnTo>
+                  <a:lnTo>
+                    <a:pt x="3643697" y="3483746"/>
+                  </a:lnTo>
+                  <a:lnTo>
+                    <a:pt x="3572075" y="3483746"/>
+                  </a:lnTo>
+                  <a:lnTo>
+                    <a:pt x="3500452" y="3483746"/>
+                  </a:lnTo>
+                  <a:lnTo>
+                    <a:pt x="3428830" y="3483746"/>
+                  </a:lnTo>
+                  <a:lnTo>
+                    <a:pt x="3357207" y="3483746"/>
+                  </a:lnTo>
+                  <a:lnTo>
+                    <a:pt x="3285584" y="3483746"/>
+                  </a:lnTo>
+                  <a:lnTo>
+                    <a:pt x="3213962" y="3483746"/>
+                  </a:lnTo>
+                  <a:lnTo>
+                    <a:pt x="3142339" y="3483746"/>
+                  </a:lnTo>
+                  <a:lnTo>
+                    <a:pt x="3070717" y="3483746"/>
+                  </a:lnTo>
+                  <a:lnTo>
+                    <a:pt x="2999094" y="3483746"/>
+                  </a:lnTo>
+                  <a:lnTo>
+                    <a:pt x="2927472" y="3483746"/>
+                  </a:lnTo>
+                  <a:lnTo>
+                    <a:pt x="2855849" y="3483746"/>
+                  </a:lnTo>
+                  <a:lnTo>
+                    <a:pt x="2784227" y="3483746"/>
+                  </a:lnTo>
+                  <a:lnTo>
+                    <a:pt x="2712604" y="3483746"/>
+                  </a:lnTo>
+                  <a:lnTo>
+                    <a:pt x="2640982" y="3483746"/>
+                  </a:lnTo>
+                  <a:lnTo>
+                    <a:pt x="2569359" y="3483746"/>
+                  </a:lnTo>
+                  <a:lnTo>
+                    <a:pt x="2497737" y="3483746"/>
+                  </a:lnTo>
+                  <a:lnTo>
+                    <a:pt x="2426114" y="3483746"/>
+                  </a:lnTo>
+                  <a:lnTo>
+                    <a:pt x="2354492" y="3483746"/>
+                  </a:lnTo>
+                  <a:lnTo>
+                    <a:pt x="2282869" y="3483746"/>
+                  </a:lnTo>
+                  <a:lnTo>
+                    <a:pt x="2211247" y="3483746"/>
+                  </a:lnTo>
+                  <a:lnTo>
+                    <a:pt x="2139624" y="3483746"/>
+                  </a:lnTo>
+                  <a:lnTo>
+                    <a:pt x="2068002" y="3483746"/>
+                  </a:lnTo>
+                  <a:lnTo>
+                    <a:pt x="1996379" y="3483746"/>
+                  </a:lnTo>
+                  <a:lnTo>
+                    <a:pt x="1924756" y="3483746"/>
+                  </a:lnTo>
+                  <a:lnTo>
+                    <a:pt x="1853134" y="3483746"/>
+                  </a:lnTo>
+                  <a:lnTo>
+                    <a:pt x="1781511" y="3483746"/>
+                  </a:lnTo>
+                  <a:lnTo>
+                    <a:pt x="1709889" y="3483746"/>
+                  </a:lnTo>
+                  <a:lnTo>
+                    <a:pt x="1638266" y="3483746"/>
+                  </a:lnTo>
+                  <a:lnTo>
+                    <a:pt x="1566644" y="3483746"/>
+                  </a:lnTo>
+                  <a:lnTo>
+                    <a:pt x="1495021" y="3483746"/>
+                  </a:lnTo>
+                  <a:lnTo>
+                    <a:pt x="1423399" y="3483746"/>
+                  </a:lnTo>
+                  <a:lnTo>
+                    <a:pt x="1351776" y="3483746"/>
+                  </a:lnTo>
+                  <a:lnTo>
+                    <a:pt x="1280154" y="3483746"/>
+                  </a:lnTo>
+                  <a:lnTo>
+                    <a:pt x="1208531" y="3483746"/>
+                  </a:lnTo>
+                  <a:lnTo>
+                    <a:pt x="1136909" y="3483746"/>
+                  </a:lnTo>
+                  <a:lnTo>
+                    <a:pt x="1065286" y="3483745"/>
+                  </a:lnTo>
+                  <a:lnTo>
+                    <a:pt x="993664" y="3483742"/>
+                  </a:lnTo>
+                  <a:lnTo>
+                    <a:pt x="922041" y="3483735"/>
+                  </a:lnTo>
+                  <a:lnTo>
+                    <a:pt x="850419" y="3483716"/>
+                  </a:lnTo>
+                  <a:lnTo>
+                    <a:pt x="778796" y="3483663"/>
+                  </a:lnTo>
+                  <a:lnTo>
+                    <a:pt x="707174" y="3483519"/>
+                  </a:lnTo>
+                  <a:lnTo>
+                    <a:pt x="635551" y="3483124"/>
+                  </a:lnTo>
+                  <a:lnTo>
+                    <a:pt x="563928" y="3482040"/>
+                  </a:lnTo>
+                  <a:lnTo>
+                    <a:pt x="492306" y="3479073"/>
+                  </a:lnTo>
+                  <a:lnTo>
+                    <a:pt x="420683" y="3470947"/>
+                  </a:lnTo>
+                  <a:lnTo>
+                    <a:pt x="349061" y="3448689"/>
+                  </a:lnTo>
+                  <a:lnTo>
+                    <a:pt x="277438" y="3387725"/>
+                  </a:lnTo>
+                  <a:lnTo>
+                    <a:pt x="205816" y="3220743"/>
+                  </a:lnTo>
+                  <a:lnTo>
+                    <a:pt x="134193" y="2763380"/>
+                  </a:lnTo>
+                  <a:lnTo>
+                    <a:pt x="62571" y="1818078"/>
                   </a:lnTo>
                   <a:lnTo>
                     <a:pt x="0" y="0"/>
@@ -3393,192 +3390,192 @@
           </p:nvSpPr>
           <p:spPr>
             <a:xfrm>
-              <a:off x="4049418" y="2073503"/>
-              <a:ext cx="4213261" cy="3483746"/>
+              <a:off x="4077039" y="2073503"/>
+              <a:ext cx="4185639" cy="3483746"/>
             </a:xfrm>
             <a:custGeom>
               <a:avLst/>
               <a:pathLst>
-                <a:path w="4213261" h="3483746">
+                <a:path w="4185639" h="3483746">
                   <a:moveTo>
                     <a:pt x="0" y="0"/>
                   </a:moveTo>
                   <a:lnTo>
-                    <a:pt x="59154" y="1849016"/>
-                  </a:lnTo>
-                  <a:lnTo>
-                    <a:pt x="130777" y="2755871"/>
-                  </a:lnTo>
-                  <a:lnTo>
-                    <a:pt x="202399" y="3088974"/>
-                  </a:lnTo>
-                  <a:lnTo>
-                    <a:pt x="274022" y="3269637"/>
-                  </a:lnTo>
-                  <a:lnTo>
-                    <a:pt x="345644" y="3367622"/>
-                  </a:lnTo>
-                  <a:lnTo>
-                    <a:pt x="417267" y="3420765"/>
-                  </a:lnTo>
-                  <a:lnTo>
-                    <a:pt x="488889" y="3449588"/>
-                  </a:lnTo>
-                  <a:lnTo>
-                    <a:pt x="560512" y="3465220"/>
-                  </a:lnTo>
-                  <a:lnTo>
-                    <a:pt x="632134" y="3473698"/>
-                  </a:lnTo>
-                  <a:lnTo>
-                    <a:pt x="703757" y="3478297"/>
-                  </a:lnTo>
-                  <a:lnTo>
-                    <a:pt x="775379" y="3480791"/>
-                  </a:lnTo>
-                  <a:lnTo>
-                    <a:pt x="847002" y="3482143"/>
-                  </a:lnTo>
-                  <a:lnTo>
-                    <a:pt x="918625" y="3482877"/>
-                  </a:lnTo>
-                  <a:lnTo>
-                    <a:pt x="990247" y="3483275"/>
-                  </a:lnTo>
-                  <a:lnTo>
-                    <a:pt x="1061870" y="3483491"/>
-                  </a:lnTo>
-                  <a:lnTo>
-                    <a:pt x="1133492" y="3483608"/>
-                  </a:lnTo>
-                  <a:lnTo>
-                    <a:pt x="1205115" y="3483671"/>
-                  </a:lnTo>
-                  <a:lnTo>
-                    <a:pt x="1276737" y="3483706"/>
-                  </a:lnTo>
-                  <a:lnTo>
-                    <a:pt x="1348360" y="3483724"/>
-                  </a:lnTo>
-                  <a:lnTo>
-                    <a:pt x="1419982" y="3483734"/>
-                  </a:lnTo>
-                  <a:lnTo>
-                    <a:pt x="1491605" y="3483740"/>
-                  </a:lnTo>
-                  <a:lnTo>
-                    <a:pt x="1563227" y="3483743"/>
-                  </a:lnTo>
-                  <a:lnTo>
-                    <a:pt x="1634850" y="3483744"/>
-                  </a:lnTo>
-                  <a:lnTo>
-                    <a:pt x="1706472" y="3483745"/>
-                  </a:lnTo>
-                  <a:lnTo>
-                    <a:pt x="1778095" y="3483746"/>
-                  </a:lnTo>
-                  <a:lnTo>
-                    <a:pt x="1849717" y="3483746"/>
-                  </a:lnTo>
-                  <a:lnTo>
-                    <a:pt x="1921340" y="3483746"/>
-                  </a:lnTo>
-                  <a:lnTo>
-                    <a:pt x="1992962" y="3483746"/>
-                  </a:lnTo>
-                  <a:lnTo>
-                    <a:pt x="2064585" y="3483746"/>
-                  </a:lnTo>
-                  <a:lnTo>
-                    <a:pt x="2136207" y="3483746"/>
-                  </a:lnTo>
-                  <a:lnTo>
-                    <a:pt x="2207830" y="3483746"/>
-                  </a:lnTo>
-                  <a:lnTo>
-                    <a:pt x="2279453" y="3483746"/>
-                  </a:lnTo>
-                  <a:lnTo>
-                    <a:pt x="2351075" y="3483746"/>
-                  </a:lnTo>
-                  <a:lnTo>
-                    <a:pt x="2422698" y="3483746"/>
-                  </a:lnTo>
-                  <a:lnTo>
-                    <a:pt x="2494320" y="3483746"/>
-                  </a:lnTo>
-                  <a:lnTo>
-                    <a:pt x="2565943" y="3483746"/>
-                  </a:lnTo>
-                  <a:lnTo>
-                    <a:pt x="2637565" y="3483746"/>
-                  </a:lnTo>
-                  <a:lnTo>
-                    <a:pt x="2709188" y="3483746"/>
-                  </a:lnTo>
-                  <a:lnTo>
-                    <a:pt x="2780810" y="3483746"/>
-                  </a:lnTo>
-                  <a:lnTo>
-                    <a:pt x="2852433" y="3483746"/>
-                  </a:lnTo>
-                  <a:lnTo>
-                    <a:pt x="2924055" y="3483746"/>
-                  </a:lnTo>
-                  <a:lnTo>
-                    <a:pt x="2995678" y="3483746"/>
-                  </a:lnTo>
-                  <a:lnTo>
-                    <a:pt x="3067300" y="3483746"/>
-                  </a:lnTo>
-                  <a:lnTo>
-                    <a:pt x="3138923" y="3483746"/>
-                  </a:lnTo>
-                  <a:lnTo>
-                    <a:pt x="3210545" y="3483746"/>
-                  </a:lnTo>
-                  <a:lnTo>
-                    <a:pt x="3282168" y="3483746"/>
-                  </a:lnTo>
-                  <a:lnTo>
-                    <a:pt x="3353790" y="3483746"/>
-                  </a:lnTo>
-                  <a:lnTo>
-                    <a:pt x="3425413" y="3483746"/>
-                  </a:lnTo>
-                  <a:lnTo>
-                    <a:pt x="3497035" y="3483746"/>
-                  </a:lnTo>
-                  <a:lnTo>
-                    <a:pt x="3568658" y="3483746"/>
-                  </a:lnTo>
-                  <a:lnTo>
-                    <a:pt x="3640281" y="3483746"/>
-                  </a:lnTo>
-                  <a:lnTo>
-                    <a:pt x="3711903" y="3483746"/>
-                  </a:lnTo>
-                  <a:lnTo>
-                    <a:pt x="3783526" y="3483746"/>
-                  </a:lnTo>
-                  <a:lnTo>
-                    <a:pt x="3855148" y="3483746"/>
-                  </a:lnTo>
-                  <a:lnTo>
-                    <a:pt x="3926771" y="3483746"/>
-                  </a:lnTo>
-                  <a:lnTo>
-                    <a:pt x="3998393" y="3483746"/>
-                  </a:lnTo>
-                  <a:lnTo>
-                    <a:pt x="4070016" y="3483746"/>
-                  </a:lnTo>
-                  <a:lnTo>
-                    <a:pt x="4141638" y="3483746"/>
-                  </a:lnTo>
-                  <a:lnTo>
-                    <a:pt x="4213261" y="3483746"/>
+                    <a:pt x="31533" y="1510661"/>
+                  </a:lnTo>
+                  <a:lnTo>
+                    <a:pt x="103155" y="2743249"/>
+                  </a:lnTo>
+                  <a:lnTo>
+                    <a:pt x="174778" y="3154548"/>
+                  </a:lnTo>
+                  <a:lnTo>
+                    <a:pt x="246400" y="3337396"/>
+                  </a:lnTo>
+                  <a:lnTo>
+                    <a:pt x="318023" y="3418684"/>
+                  </a:lnTo>
+                  <a:lnTo>
+                    <a:pt x="389645" y="3454822"/>
+                  </a:lnTo>
+                  <a:lnTo>
+                    <a:pt x="461268" y="3470888"/>
+                  </a:lnTo>
+                  <a:lnTo>
+                    <a:pt x="532891" y="3478030"/>
+                  </a:lnTo>
+                  <a:lnTo>
+                    <a:pt x="604513" y="3481205"/>
+                  </a:lnTo>
+                  <a:lnTo>
+                    <a:pt x="676136" y="3482617"/>
+                  </a:lnTo>
+                  <a:lnTo>
+                    <a:pt x="747758" y="3483244"/>
+                  </a:lnTo>
+                  <a:lnTo>
+                    <a:pt x="819381" y="3483523"/>
+                  </a:lnTo>
+                  <a:lnTo>
+                    <a:pt x="891003" y="3483647"/>
+                  </a:lnTo>
+                  <a:lnTo>
+                    <a:pt x="962626" y="3483702"/>
+                  </a:lnTo>
+                  <a:lnTo>
+                    <a:pt x="1034248" y="3483727"/>
+                  </a:lnTo>
+                  <a:lnTo>
+                    <a:pt x="1105871" y="3483738"/>
+                  </a:lnTo>
+                  <a:lnTo>
+                    <a:pt x="1177493" y="3483743"/>
+                  </a:lnTo>
+                  <a:lnTo>
+                    <a:pt x="1249116" y="3483745"/>
+                  </a:lnTo>
+                  <a:lnTo>
+                    <a:pt x="1320738" y="3483746"/>
+                  </a:lnTo>
+                  <a:lnTo>
+                    <a:pt x="1392361" y="3483746"/>
+                  </a:lnTo>
+                  <a:lnTo>
+                    <a:pt x="1463983" y="3483746"/>
+                  </a:lnTo>
+                  <a:lnTo>
+                    <a:pt x="1535606" y="3483746"/>
+                  </a:lnTo>
+                  <a:lnTo>
+                    <a:pt x="1607228" y="3483746"/>
+                  </a:lnTo>
+                  <a:lnTo>
+                    <a:pt x="1678851" y="3483746"/>
+                  </a:lnTo>
+                  <a:lnTo>
+                    <a:pt x="1750473" y="3483746"/>
+                  </a:lnTo>
+                  <a:lnTo>
+                    <a:pt x="1822096" y="3483746"/>
+                  </a:lnTo>
+                  <a:lnTo>
+                    <a:pt x="1893719" y="3483746"/>
+                  </a:lnTo>
+                  <a:lnTo>
+                    <a:pt x="1965341" y="3483746"/>
+                  </a:lnTo>
+                  <a:lnTo>
+                    <a:pt x="2036964" y="3483746"/>
+                  </a:lnTo>
+                  <a:lnTo>
+                    <a:pt x="2108586" y="3483746"/>
+                  </a:lnTo>
+                  <a:lnTo>
+                    <a:pt x="2180209" y="3483746"/>
+                  </a:lnTo>
+                  <a:lnTo>
+                    <a:pt x="2251831" y="3483746"/>
+                  </a:lnTo>
+                  <a:lnTo>
+                    <a:pt x="2323454" y="3483746"/>
+                  </a:lnTo>
+                  <a:lnTo>
+                    <a:pt x="2395076" y="3483746"/>
+                  </a:lnTo>
+                  <a:lnTo>
+                    <a:pt x="2466699" y="3483746"/>
+                  </a:lnTo>
+                  <a:lnTo>
+                    <a:pt x="2538321" y="3483746"/>
+                  </a:lnTo>
+                  <a:lnTo>
+                    <a:pt x="2609944" y="3483746"/>
+                  </a:lnTo>
+                  <a:lnTo>
+                    <a:pt x="2681566" y="3483746"/>
+                  </a:lnTo>
+                  <a:lnTo>
+                    <a:pt x="2753189" y="3483746"/>
+                  </a:lnTo>
+                  <a:lnTo>
+                    <a:pt x="2824811" y="3483746"/>
+                  </a:lnTo>
+                  <a:lnTo>
+                    <a:pt x="2896434" y="3483746"/>
+                  </a:lnTo>
+                  <a:lnTo>
+                    <a:pt x="2968056" y="3483746"/>
+                  </a:lnTo>
+                  <a:lnTo>
+                    <a:pt x="3039679" y="3483746"/>
+                  </a:lnTo>
+                  <a:lnTo>
+                    <a:pt x="3111301" y="3483746"/>
+                  </a:lnTo>
+                  <a:lnTo>
+                    <a:pt x="3182924" y="3483746"/>
+                  </a:lnTo>
+                  <a:lnTo>
+                    <a:pt x="3254547" y="3483746"/>
+                  </a:lnTo>
+                  <a:lnTo>
+                    <a:pt x="3326169" y="3483746"/>
+                  </a:lnTo>
+                  <a:lnTo>
+                    <a:pt x="3397792" y="3483746"/>
+                  </a:lnTo>
+                  <a:lnTo>
+                    <a:pt x="3469414" y="3483746"/>
+                  </a:lnTo>
+                  <a:lnTo>
+                    <a:pt x="3541037" y="3483746"/>
+                  </a:lnTo>
+                  <a:lnTo>
+                    <a:pt x="3612659" y="3483746"/>
+                  </a:lnTo>
+                  <a:lnTo>
+                    <a:pt x="3684282" y="3483746"/>
+                  </a:lnTo>
+                  <a:lnTo>
+                    <a:pt x="3755904" y="3483746"/>
+                  </a:lnTo>
+                  <a:lnTo>
+                    <a:pt x="3827527" y="3483746"/>
+                  </a:lnTo>
+                  <a:lnTo>
+                    <a:pt x="3899149" y="3483746"/>
+                  </a:lnTo>
+                  <a:lnTo>
+                    <a:pt x="3970772" y="3483746"/>
+                  </a:lnTo>
+                  <a:lnTo>
+                    <a:pt x="4042394" y="3483746"/>
+                  </a:lnTo>
+                  <a:lnTo>
+                    <a:pt x="4114017" y="3483746"/>
+                  </a:lnTo>
+                  <a:lnTo>
+                    <a:pt x="4185639" y="3483746"/>
                   </a:lnTo>
                 </a:path>
               </a:pathLst>
@@ -3598,192 +3595,189 @@
           </p:nvSpPr>
           <p:spPr>
             <a:xfrm>
-              <a:off x="4002328" y="2073503"/>
-              <a:ext cx="4260351" cy="3483746"/>
+              <a:off x="4046001" y="2073503"/>
+              <a:ext cx="4216677" cy="3483746"/>
             </a:xfrm>
             <a:custGeom>
               <a:avLst/>
               <a:pathLst>
-                <a:path w="4260351" h="3483746">
+                <a:path w="4216677" h="3483746">
                   <a:moveTo>
-                    <a:pt x="4260351" y="3483746"/>
+                    <a:pt x="4216677" y="3483746"/>
                   </a:moveTo>
                   <a:lnTo>
-                    <a:pt x="4188728" y="3483746"/>
-                  </a:lnTo>
-                  <a:lnTo>
-                    <a:pt x="4117106" y="3483746"/>
-                  </a:lnTo>
-                  <a:lnTo>
-                    <a:pt x="4045483" y="3483746"/>
-                  </a:lnTo>
-                  <a:lnTo>
-                    <a:pt x="3973861" y="3483746"/>
-                  </a:lnTo>
-                  <a:lnTo>
-                    <a:pt x="3902238" y="3483746"/>
-                  </a:lnTo>
-                  <a:lnTo>
-                    <a:pt x="3830616" y="3483746"/>
-                  </a:lnTo>
-                  <a:lnTo>
-                    <a:pt x="3758993" y="3483746"/>
-                  </a:lnTo>
-                  <a:lnTo>
-                    <a:pt x="3687371" y="3483746"/>
-                  </a:lnTo>
-                  <a:lnTo>
-                    <a:pt x="3615748" y="3483746"/>
-                  </a:lnTo>
-                  <a:lnTo>
-                    <a:pt x="3544126" y="3483746"/>
-                  </a:lnTo>
-                  <a:lnTo>
-                    <a:pt x="3472503" y="3483746"/>
-                  </a:lnTo>
-                  <a:lnTo>
-                    <a:pt x="3400881" y="3483746"/>
-                  </a:lnTo>
-                  <a:lnTo>
-                    <a:pt x="3329258" y="3483746"/>
-                  </a:lnTo>
-                  <a:lnTo>
-                    <a:pt x="3257636" y="3483746"/>
-                  </a:lnTo>
-                  <a:lnTo>
-                    <a:pt x="3186013" y="3483746"/>
-                  </a:lnTo>
-                  <a:lnTo>
-                    <a:pt x="3114390" y="3483746"/>
-                  </a:lnTo>
-                  <a:lnTo>
-                    <a:pt x="3042768" y="3483746"/>
-                  </a:lnTo>
-                  <a:lnTo>
-                    <a:pt x="2971145" y="3483746"/>
-                  </a:lnTo>
-                  <a:lnTo>
-                    <a:pt x="2899523" y="3483746"/>
-                  </a:lnTo>
-                  <a:lnTo>
-                    <a:pt x="2827900" y="3483746"/>
-                  </a:lnTo>
-                  <a:lnTo>
-                    <a:pt x="2756278" y="3483746"/>
-                  </a:lnTo>
-                  <a:lnTo>
-                    <a:pt x="2684655" y="3483746"/>
-                  </a:lnTo>
-                  <a:lnTo>
-                    <a:pt x="2613033" y="3483746"/>
-                  </a:lnTo>
-                  <a:lnTo>
-                    <a:pt x="2541410" y="3483746"/>
-                  </a:lnTo>
-                  <a:lnTo>
-                    <a:pt x="2469788" y="3483746"/>
-                  </a:lnTo>
-                  <a:lnTo>
-                    <a:pt x="2398165" y="3483746"/>
-                  </a:lnTo>
-                  <a:lnTo>
-                    <a:pt x="2326543" y="3483746"/>
-                  </a:lnTo>
-                  <a:lnTo>
-                    <a:pt x="2254920" y="3483746"/>
-                  </a:lnTo>
-                  <a:lnTo>
-                    <a:pt x="2183298" y="3483746"/>
-                  </a:lnTo>
-                  <a:lnTo>
-                    <a:pt x="2111675" y="3483746"/>
-                  </a:lnTo>
-                  <a:lnTo>
-                    <a:pt x="2040053" y="3483746"/>
-                  </a:lnTo>
-                  <a:lnTo>
-                    <a:pt x="1968430" y="3483746"/>
-                  </a:lnTo>
-                  <a:lnTo>
-                    <a:pt x="1896808" y="3483746"/>
-                  </a:lnTo>
-                  <a:lnTo>
-                    <a:pt x="1825185" y="3483746"/>
-                  </a:lnTo>
-                  <a:lnTo>
-                    <a:pt x="1753562" y="3483746"/>
-                  </a:lnTo>
-                  <a:lnTo>
-                    <a:pt x="1681940" y="3483746"/>
-                  </a:lnTo>
-                  <a:lnTo>
-                    <a:pt x="1610317" y="3483746"/>
-                  </a:lnTo>
-                  <a:lnTo>
-                    <a:pt x="1538695" y="3483746"/>
-                  </a:lnTo>
-                  <a:lnTo>
-                    <a:pt x="1467072" y="3483746"/>
-                  </a:lnTo>
-                  <a:lnTo>
-                    <a:pt x="1395450" y="3483746"/>
-                  </a:lnTo>
-                  <a:lnTo>
-                    <a:pt x="1323827" y="3483746"/>
-                  </a:lnTo>
-                  <a:lnTo>
-                    <a:pt x="1252205" y="3483745"/>
-                  </a:lnTo>
-                  <a:lnTo>
-                    <a:pt x="1180582" y="3483742"/>
-                  </a:lnTo>
-                  <a:lnTo>
-                    <a:pt x="1108960" y="3483737"/>
-                  </a:lnTo>
-                  <a:lnTo>
-                    <a:pt x="1037337" y="3483724"/>
-                  </a:lnTo>
-                  <a:lnTo>
-                    <a:pt x="965715" y="3483694"/>
-                  </a:lnTo>
-                  <a:lnTo>
-                    <a:pt x="894092" y="3483623"/>
-                  </a:lnTo>
-                  <a:lnTo>
-                    <a:pt x="822470" y="3483453"/>
-                  </a:lnTo>
-                  <a:lnTo>
-                    <a:pt x="750847" y="3483052"/>
-                  </a:lnTo>
-                  <a:lnTo>
-                    <a:pt x="679225" y="3482101"/>
-                  </a:lnTo>
-                  <a:lnTo>
-                    <a:pt x="607602" y="3479848"/>
-                  </a:lnTo>
-                  <a:lnTo>
-                    <a:pt x="535980" y="3474509"/>
-                  </a:lnTo>
-                  <a:lnTo>
-                    <a:pt x="464357" y="3461860"/>
-                  </a:lnTo>
-                  <a:lnTo>
-                    <a:pt x="392734" y="3431886"/>
-                  </a:lnTo>
-                  <a:lnTo>
-                    <a:pt x="321112" y="3360864"/>
-                  </a:lnTo>
-                  <a:lnTo>
-                    <a:pt x="249489" y="3192580"/>
-                  </a:lnTo>
-                  <a:lnTo>
-                    <a:pt x="177867" y="2793834"/>
-                  </a:lnTo>
-                  <a:lnTo>
-                    <a:pt x="106244" y="2141698"/>
-                  </a:lnTo>
-                  <a:lnTo>
-                    <a:pt x="34622" y="1009296"/>
+                    <a:pt x="4145055" y="3483746"/>
+                  </a:lnTo>
+                  <a:lnTo>
+                    <a:pt x="4073432" y="3483746"/>
+                  </a:lnTo>
+                  <a:lnTo>
+                    <a:pt x="4001810" y="3483746"/>
+                  </a:lnTo>
+                  <a:lnTo>
+                    <a:pt x="3930187" y="3483746"/>
+                  </a:lnTo>
+                  <a:lnTo>
+                    <a:pt x="3858565" y="3483746"/>
+                  </a:lnTo>
+                  <a:lnTo>
+                    <a:pt x="3786942" y="3483746"/>
+                  </a:lnTo>
+                  <a:lnTo>
+                    <a:pt x="3715320" y="3483746"/>
+                  </a:lnTo>
+                  <a:lnTo>
+                    <a:pt x="3643697" y="3483746"/>
+                  </a:lnTo>
+                  <a:lnTo>
+                    <a:pt x="3572075" y="3483746"/>
+                  </a:lnTo>
+                  <a:lnTo>
+                    <a:pt x="3500452" y="3483746"/>
+                  </a:lnTo>
+                  <a:lnTo>
+                    <a:pt x="3428830" y="3483746"/>
+                  </a:lnTo>
+                  <a:lnTo>
+                    <a:pt x="3357207" y="3483746"/>
+                  </a:lnTo>
+                  <a:lnTo>
+                    <a:pt x="3285584" y="3483746"/>
+                  </a:lnTo>
+                  <a:lnTo>
+                    <a:pt x="3213962" y="3483746"/>
+                  </a:lnTo>
+                  <a:lnTo>
+                    <a:pt x="3142339" y="3483746"/>
+                  </a:lnTo>
+                  <a:lnTo>
+                    <a:pt x="3070717" y="3483746"/>
+                  </a:lnTo>
+                  <a:lnTo>
+                    <a:pt x="2999094" y="3483746"/>
+                  </a:lnTo>
+                  <a:lnTo>
+                    <a:pt x="2927472" y="3483746"/>
+                  </a:lnTo>
+                  <a:lnTo>
+                    <a:pt x="2855849" y="3483746"/>
+                  </a:lnTo>
+                  <a:lnTo>
+                    <a:pt x="2784227" y="3483746"/>
+                  </a:lnTo>
+                  <a:lnTo>
+                    <a:pt x="2712604" y="3483746"/>
+                  </a:lnTo>
+                  <a:lnTo>
+                    <a:pt x="2640982" y="3483746"/>
+                  </a:lnTo>
+                  <a:lnTo>
+                    <a:pt x="2569359" y="3483746"/>
+                  </a:lnTo>
+                  <a:lnTo>
+                    <a:pt x="2497737" y="3483746"/>
+                  </a:lnTo>
+                  <a:lnTo>
+                    <a:pt x="2426114" y="3483746"/>
+                  </a:lnTo>
+                  <a:lnTo>
+                    <a:pt x="2354492" y="3483746"/>
+                  </a:lnTo>
+                  <a:lnTo>
+                    <a:pt x="2282869" y="3483746"/>
+                  </a:lnTo>
+                  <a:lnTo>
+                    <a:pt x="2211247" y="3483746"/>
+                  </a:lnTo>
+                  <a:lnTo>
+                    <a:pt x="2139624" y="3483746"/>
+                  </a:lnTo>
+                  <a:lnTo>
+                    <a:pt x="2068002" y="3483746"/>
+                  </a:lnTo>
+                  <a:lnTo>
+                    <a:pt x="1996379" y="3483746"/>
+                  </a:lnTo>
+                  <a:lnTo>
+                    <a:pt x="1924756" y="3483746"/>
+                  </a:lnTo>
+                  <a:lnTo>
+                    <a:pt x="1853134" y="3483746"/>
+                  </a:lnTo>
+                  <a:lnTo>
+                    <a:pt x="1781511" y="3483746"/>
+                  </a:lnTo>
+                  <a:lnTo>
+                    <a:pt x="1709889" y="3483746"/>
+                  </a:lnTo>
+                  <a:lnTo>
+                    <a:pt x="1638266" y="3483746"/>
+                  </a:lnTo>
+                  <a:lnTo>
+                    <a:pt x="1566644" y="3483746"/>
+                  </a:lnTo>
+                  <a:lnTo>
+                    <a:pt x="1495021" y="3483746"/>
+                  </a:lnTo>
+                  <a:lnTo>
+                    <a:pt x="1423399" y="3483746"/>
+                  </a:lnTo>
+                  <a:lnTo>
+                    <a:pt x="1351776" y="3483746"/>
+                  </a:lnTo>
+                  <a:lnTo>
+                    <a:pt x="1280154" y="3483746"/>
+                  </a:lnTo>
+                  <a:lnTo>
+                    <a:pt x="1208531" y="3483746"/>
+                  </a:lnTo>
+                  <a:lnTo>
+                    <a:pt x="1136909" y="3483746"/>
+                  </a:lnTo>
+                  <a:lnTo>
+                    <a:pt x="1065286" y="3483745"/>
+                  </a:lnTo>
+                  <a:lnTo>
+                    <a:pt x="993664" y="3483742"/>
+                  </a:lnTo>
+                  <a:lnTo>
+                    <a:pt x="922041" y="3483735"/>
+                  </a:lnTo>
+                  <a:lnTo>
+                    <a:pt x="850419" y="3483716"/>
+                  </a:lnTo>
+                  <a:lnTo>
+                    <a:pt x="778796" y="3483663"/>
+                  </a:lnTo>
+                  <a:lnTo>
+                    <a:pt x="707174" y="3483519"/>
+                  </a:lnTo>
+                  <a:lnTo>
+                    <a:pt x="635551" y="3483124"/>
+                  </a:lnTo>
+                  <a:lnTo>
+                    <a:pt x="563928" y="3482040"/>
+                  </a:lnTo>
+                  <a:lnTo>
+                    <a:pt x="492306" y="3479073"/>
+                  </a:lnTo>
+                  <a:lnTo>
+                    <a:pt x="420683" y="3470947"/>
+                  </a:lnTo>
+                  <a:lnTo>
+                    <a:pt x="349061" y="3448689"/>
+                  </a:lnTo>
+                  <a:lnTo>
+                    <a:pt x="277438" y="3387725"/>
+                  </a:lnTo>
+                  <a:lnTo>
+                    <a:pt x="205816" y="3220743"/>
+                  </a:lnTo>
+                  <a:lnTo>
+                    <a:pt x="134193" y="2763380"/>
+                  </a:lnTo>
+                  <a:lnTo>
+                    <a:pt x="62571" y="1818078"/>
                   </a:lnTo>
                   <a:lnTo>
                     <a:pt x="0" y="0"/>
@@ -3806,195 +3800,192 @@
           </p:nvSpPr>
           <p:spPr>
             <a:xfrm>
-              <a:off x="4028720" y="2073503"/>
-              <a:ext cx="4233959" cy="3483746"/>
+              <a:off x="4064034" y="2073503"/>
+              <a:ext cx="4198644" cy="3483746"/>
             </a:xfrm>
             <a:custGeom>
               <a:avLst/>
               <a:pathLst>
-                <a:path w="4233959" h="3483746">
+                <a:path w="4198644" h="3483746">
                   <a:moveTo>
                     <a:pt x="0" y="0"/>
                   </a:moveTo>
                   <a:lnTo>
-                    <a:pt x="8230" y="387833"/>
-                  </a:lnTo>
-                  <a:lnTo>
-                    <a:pt x="79852" y="2002569"/>
-                  </a:lnTo>
-                  <a:lnTo>
-                    <a:pt x="151475" y="2775107"/>
-                  </a:lnTo>
-                  <a:lnTo>
-                    <a:pt x="223097" y="3144712"/>
-                  </a:lnTo>
-                  <a:lnTo>
-                    <a:pt x="294720" y="3321542"/>
-                  </a:lnTo>
-                  <a:lnTo>
-                    <a:pt x="366342" y="3406143"/>
-                  </a:lnTo>
-                  <a:lnTo>
-                    <a:pt x="437965" y="3446619"/>
-                  </a:lnTo>
-                  <a:lnTo>
-                    <a:pt x="509587" y="3465983"/>
-                  </a:lnTo>
-                  <a:lnTo>
-                    <a:pt x="581210" y="3475248"/>
-                  </a:lnTo>
-                  <a:lnTo>
-                    <a:pt x="652832" y="3479681"/>
-                  </a:lnTo>
-                  <a:lnTo>
-                    <a:pt x="724455" y="3481801"/>
-                  </a:lnTo>
-                  <a:lnTo>
-                    <a:pt x="796078" y="3482816"/>
-                  </a:lnTo>
-                  <a:lnTo>
-                    <a:pt x="867700" y="3483301"/>
-                  </a:lnTo>
-                  <a:lnTo>
-                    <a:pt x="939323" y="3483533"/>
-                  </a:lnTo>
-                  <a:lnTo>
-                    <a:pt x="1010945" y="3483644"/>
-                  </a:lnTo>
-                  <a:lnTo>
-                    <a:pt x="1082568" y="3483698"/>
-                  </a:lnTo>
-                  <a:lnTo>
-                    <a:pt x="1154190" y="3483723"/>
-                  </a:lnTo>
-                  <a:lnTo>
-                    <a:pt x="1225813" y="3483735"/>
-                  </a:lnTo>
-                  <a:lnTo>
-                    <a:pt x="1297435" y="3483741"/>
-                  </a:lnTo>
-                  <a:lnTo>
-                    <a:pt x="1369058" y="3483744"/>
-                  </a:lnTo>
-                  <a:lnTo>
-                    <a:pt x="1440680" y="3483745"/>
-                  </a:lnTo>
-                  <a:lnTo>
-                    <a:pt x="1512303" y="3483746"/>
-                  </a:lnTo>
-                  <a:lnTo>
-                    <a:pt x="1583925" y="3483746"/>
-                  </a:lnTo>
-                  <a:lnTo>
-                    <a:pt x="1655548" y="3483746"/>
-                  </a:lnTo>
-                  <a:lnTo>
-                    <a:pt x="1727170" y="3483746"/>
-                  </a:lnTo>
-                  <a:lnTo>
-                    <a:pt x="1798793" y="3483746"/>
-                  </a:lnTo>
-                  <a:lnTo>
-                    <a:pt x="1870415" y="3483746"/>
-                  </a:lnTo>
-                  <a:lnTo>
-                    <a:pt x="1942038" y="3483746"/>
-                  </a:lnTo>
-                  <a:lnTo>
-                    <a:pt x="2013660" y="3483746"/>
-                  </a:lnTo>
-                  <a:lnTo>
-                    <a:pt x="2085283" y="3483746"/>
-                  </a:lnTo>
-                  <a:lnTo>
-                    <a:pt x="2156906" y="3483746"/>
-                  </a:lnTo>
-                  <a:lnTo>
-                    <a:pt x="2228528" y="3483746"/>
-                  </a:lnTo>
-                  <a:lnTo>
-                    <a:pt x="2300151" y="3483746"/>
-                  </a:lnTo>
-                  <a:lnTo>
-                    <a:pt x="2371773" y="3483746"/>
-                  </a:lnTo>
-                  <a:lnTo>
-                    <a:pt x="2443396" y="3483746"/>
-                  </a:lnTo>
-                  <a:lnTo>
-                    <a:pt x="2515018" y="3483746"/>
-                  </a:lnTo>
-                  <a:lnTo>
-                    <a:pt x="2586641" y="3483746"/>
-                  </a:lnTo>
-                  <a:lnTo>
-                    <a:pt x="2658263" y="3483746"/>
-                  </a:lnTo>
-                  <a:lnTo>
-                    <a:pt x="2729886" y="3483746"/>
-                  </a:lnTo>
-                  <a:lnTo>
-                    <a:pt x="2801508" y="3483746"/>
-                  </a:lnTo>
-                  <a:lnTo>
-                    <a:pt x="2873131" y="3483746"/>
-                  </a:lnTo>
-                  <a:lnTo>
-                    <a:pt x="2944753" y="3483746"/>
-                  </a:lnTo>
-                  <a:lnTo>
-                    <a:pt x="3016376" y="3483746"/>
-                  </a:lnTo>
-                  <a:lnTo>
-                    <a:pt x="3087998" y="3483746"/>
-                  </a:lnTo>
-                  <a:lnTo>
-                    <a:pt x="3159621" y="3483746"/>
-                  </a:lnTo>
-                  <a:lnTo>
-                    <a:pt x="3231243" y="3483746"/>
-                  </a:lnTo>
-                  <a:lnTo>
-                    <a:pt x="3302866" y="3483746"/>
-                  </a:lnTo>
-                  <a:lnTo>
-                    <a:pt x="3374488" y="3483746"/>
-                  </a:lnTo>
-                  <a:lnTo>
-                    <a:pt x="3446111" y="3483746"/>
-                  </a:lnTo>
-                  <a:lnTo>
-                    <a:pt x="3517734" y="3483746"/>
-                  </a:lnTo>
-                  <a:lnTo>
-                    <a:pt x="3589356" y="3483746"/>
-                  </a:lnTo>
-                  <a:lnTo>
-                    <a:pt x="3660979" y="3483746"/>
-                  </a:lnTo>
-                  <a:lnTo>
-                    <a:pt x="3732601" y="3483746"/>
-                  </a:lnTo>
-                  <a:lnTo>
-                    <a:pt x="3804224" y="3483746"/>
-                  </a:lnTo>
-                  <a:lnTo>
-                    <a:pt x="3875846" y="3483746"/>
-                  </a:lnTo>
-                  <a:lnTo>
-                    <a:pt x="3947469" y="3483746"/>
-                  </a:lnTo>
-                  <a:lnTo>
-                    <a:pt x="4019091" y="3483746"/>
-                  </a:lnTo>
-                  <a:lnTo>
-                    <a:pt x="4090714" y="3483746"/>
-                  </a:lnTo>
-                  <a:lnTo>
-                    <a:pt x="4162336" y="3483746"/>
-                  </a:lnTo>
-                  <a:lnTo>
-                    <a:pt x="4233959" y="3483746"/>
+                    <a:pt x="44538" y="1670874"/>
+                  </a:lnTo>
+                  <a:lnTo>
+                    <a:pt x="116160" y="2753384"/>
+                  </a:lnTo>
+                  <a:lnTo>
+                    <a:pt x="187783" y="3189501"/>
+                  </a:lnTo>
+                  <a:lnTo>
+                    <a:pt x="259405" y="3365202"/>
+                  </a:lnTo>
+                  <a:lnTo>
+                    <a:pt x="331028" y="3435988"/>
+                  </a:lnTo>
+                  <a:lnTo>
+                    <a:pt x="402650" y="3464506"/>
+                  </a:lnTo>
+                  <a:lnTo>
+                    <a:pt x="474273" y="3475995"/>
+                  </a:lnTo>
+                  <a:lnTo>
+                    <a:pt x="545895" y="3480623"/>
+                  </a:lnTo>
+                  <a:lnTo>
+                    <a:pt x="617518" y="3482488"/>
+                  </a:lnTo>
+                  <a:lnTo>
+                    <a:pt x="689140" y="3483240"/>
+                  </a:lnTo>
+                  <a:lnTo>
+                    <a:pt x="760763" y="3483542"/>
+                  </a:lnTo>
+                  <a:lnTo>
+                    <a:pt x="832385" y="3483664"/>
+                  </a:lnTo>
+                  <a:lnTo>
+                    <a:pt x="904008" y="3483713"/>
+                  </a:lnTo>
+                  <a:lnTo>
+                    <a:pt x="975631" y="3483733"/>
+                  </a:lnTo>
+                  <a:lnTo>
+                    <a:pt x="1047253" y="3483741"/>
+                  </a:lnTo>
+                  <a:lnTo>
+                    <a:pt x="1118876" y="3483744"/>
+                  </a:lnTo>
+                  <a:lnTo>
+                    <a:pt x="1190498" y="3483746"/>
+                  </a:lnTo>
+                  <a:lnTo>
+                    <a:pt x="1262121" y="3483746"/>
+                  </a:lnTo>
+                  <a:lnTo>
+                    <a:pt x="1333743" y="3483746"/>
+                  </a:lnTo>
+                  <a:lnTo>
+                    <a:pt x="1405366" y="3483746"/>
+                  </a:lnTo>
+                  <a:lnTo>
+                    <a:pt x="1476988" y="3483746"/>
+                  </a:lnTo>
+                  <a:lnTo>
+                    <a:pt x="1548611" y="3483746"/>
+                  </a:lnTo>
+                  <a:lnTo>
+                    <a:pt x="1620233" y="3483746"/>
+                  </a:lnTo>
+                  <a:lnTo>
+                    <a:pt x="1691856" y="3483746"/>
+                  </a:lnTo>
+                  <a:lnTo>
+                    <a:pt x="1763478" y="3483746"/>
+                  </a:lnTo>
+                  <a:lnTo>
+                    <a:pt x="1835101" y="3483746"/>
+                  </a:lnTo>
+                  <a:lnTo>
+                    <a:pt x="1906723" y="3483746"/>
+                  </a:lnTo>
+                  <a:lnTo>
+                    <a:pt x="1978346" y="3483746"/>
+                  </a:lnTo>
+                  <a:lnTo>
+                    <a:pt x="2049968" y="3483746"/>
+                  </a:lnTo>
+                  <a:lnTo>
+                    <a:pt x="2121591" y="3483746"/>
+                  </a:lnTo>
+                  <a:lnTo>
+                    <a:pt x="2193213" y="3483746"/>
+                  </a:lnTo>
+                  <a:lnTo>
+                    <a:pt x="2264836" y="3483746"/>
+                  </a:lnTo>
+                  <a:lnTo>
+                    <a:pt x="2336459" y="3483746"/>
+                  </a:lnTo>
+                  <a:lnTo>
+                    <a:pt x="2408081" y="3483746"/>
+                  </a:lnTo>
+                  <a:lnTo>
+                    <a:pt x="2479704" y="3483746"/>
+                  </a:lnTo>
+                  <a:lnTo>
+                    <a:pt x="2551326" y="3483746"/>
+                  </a:lnTo>
+                  <a:lnTo>
+                    <a:pt x="2622949" y="3483746"/>
+                  </a:lnTo>
+                  <a:lnTo>
+                    <a:pt x="2694571" y="3483746"/>
+                  </a:lnTo>
+                  <a:lnTo>
+                    <a:pt x="2766194" y="3483746"/>
+                  </a:lnTo>
+                  <a:lnTo>
+                    <a:pt x="2837816" y="3483746"/>
+                  </a:lnTo>
+                  <a:lnTo>
+                    <a:pt x="2909439" y="3483746"/>
+                  </a:lnTo>
+                  <a:lnTo>
+                    <a:pt x="2981061" y="3483746"/>
+                  </a:lnTo>
+                  <a:lnTo>
+                    <a:pt x="3052684" y="3483746"/>
+                  </a:lnTo>
+                  <a:lnTo>
+                    <a:pt x="3124306" y="3483746"/>
+                  </a:lnTo>
+                  <a:lnTo>
+                    <a:pt x="3195929" y="3483746"/>
+                  </a:lnTo>
+                  <a:lnTo>
+                    <a:pt x="3267551" y="3483746"/>
+                  </a:lnTo>
+                  <a:lnTo>
+                    <a:pt x="3339174" y="3483746"/>
+                  </a:lnTo>
+                  <a:lnTo>
+                    <a:pt x="3410796" y="3483746"/>
+                  </a:lnTo>
+                  <a:lnTo>
+                    <a:pt x="3482419" y="3483746"/>
+                  </a:lnTo>
+                  <a:lnTo>
+                    <a:pt x="3554041" y="3483746"/>
+                  </a:lnTo>
+                  <a:lnTo>
+                    <a:pt x="3625664" y="3483746"/>
+                  </a:lnTo>
+                  <a:lnTo>
+                    <a:pt x="3697287" y="3483746"/>
+                  </a:lnTo>
+                  <a:lnTo>
+                    <a:pt x="3768909" y="3483746"/>
+                  </a:lnTo>
+                  <a:lnTo>
+                    <a:pt x="3840532" y="3483746"/>
+                  </a:lnTo>
+                  <a:lnTo>
+                    <a:pt x="3912154" y="3483746"/>
+                  </a:lnTo>
+                  <a:lnTo>
+                    <a:pt x="3983777" y="3483746"/>
+                  </a:lnTo>
+                  <a:lnTo>
+                    <a:pt x="4055399" y="3483746"/>
+                  </a:lnTo>
+                  <a:lnTo>
+                    <a:pt x="4127022" y="3483746"/>
+                  </a:lnTo>
+                  <a:lnTo>
+                    <a:pt x="4198644" y="3483746"/>
                   </a:lnTo>
                 </a:path>
               </a:pathLst>
@@ -4066,7 +4057,7 @@
           </p:nvSpPr>
           <p:spPr>
             <a:xfrm>
-              <a:off x="4164901" y="2073503"/>
+              <a:off x="4170171" y="2073503"/>
               <a:ext cx="0" cy="3649639"/>
             </a:xfrm>
             <a:custGeom>
@@ -4339,7 +4330,7 @@
           </p:nvSpPr>
           <p:spPr>
             <a:xfrm>
-              <a:off x="2284877" y="5785772"/>
+              <a:off x="2285456" y="5785772"/>
               <a:ext cx="161574" cy="80101"/>
             </a:xfrm>
             <a:prstGeom prst="rect">
@@ -4385,7 +4376,7 @@
           </p:nvSpPr>
           <p:spPr>
             <a:xfrm>
-              <a:off x="4138944" y="5785772"/>
+              <a:off x="4139043" y="5785772"/>
               <a:ext cx="62179" cy="80101"/>
             </a:xfrm>
             <a:prstGeom prst="rect">
@@ -4431,7 +4422,7 @@
           </p:nvSpPr>
           <p:spPr>
             <a:xfrm>
-              <a:off x="5912223" y="5785772"/>
+              <a:off x="5911843" y="5785772"/>
               <a:ext cx="124358" cy="80101"/>
             </a:xfrm>
             <a:prstGeom prst="rect">
@@ -4477,7 +4468,7 @@
           </p:nvSpPr>
           <p:spPr>
             <a:xfrm>
-              <a:off x="7716592" y="5785772"/>
+              <a:off x="7715733" y="5785772"/>
               <a:ext cx="124358" cy="80101"/>
             </a:xfrm>
             <a:prstGeom prst="rect">
@@ -4616,7 +4607,7 @@
           <p:spPr>
             <a:xfrm>
               <a:off x="817517" y="1896563"/>
-              <a:ext cx="9121048" cy="82021"/>
+              <a:ext cx="9693005" cy="82021"/>
             </a:xfrm>
             <a:prstGeom prst="rect">
               <a:avLst/>
@@ -4648,7 +4639,7 @@
                   <a:latin typeface="Helvetica"/>
                   <a:cs typeface="Helvetica"/>
                 </a:rPr>
-                <a:t>subHR per 10 % decline: 10792.70 (2223.28-52392.10), p = &lt;0.001  |  per IQR decline (Δ = 27.4 %): 117410968734.68 (1536300129.05-8973074543549.02)  |  IQR: [-12.6, 14.8] %</a:t>
+                <a:t>subHR per 10 % decline: 93776.21 (27137.34-324054.54), p = &lt;0.001  |  per IQR decline (Δ = 27.2 %): 34078653512063.00 (1166230670125.69-995818970418670.00)  |  IQR: [-12.3, 14.9] %</a:t>
               </a:r>
             </a:p>
           </p:txBody>
